--- a/04.Langchain_Structured_output/LangChain_Structured_Output_Part3A.pptx
+++ b/04.Langchain_Structured_output/LangChain_Structured_Output_Part3A.pptx
@@ -305,7 +305,7 @@
             <a:pPr algn="r">
               <a:buNone/>
             </a:pPr>
-            <a:fld id="{86FC1CAB-4912-4938-94C0-0EDFF004B317}" type="slidenum">
+            <a:fld id="{4C0D1314-7ECA-44C7-80A9-A969809AD6F0}" type="slidenum">
               <a:rPr b="0" lang="en-IN" sz="1400" spc="-1" strike="noStrike">
                 <a:latin typeface="Times New Roman"/>
               </a:rPr>
@@ -446,7 +446,7 @@
               </a:lnSpc>
               <a:buNone/>
             </a:pPr>
-            <a:fld id="{943440BE-0C48-4D87-A2BE-5E3BE89ADE0C}" type="slidenum">
+            <a:fld id="{5D8DDD2D-2539-4134-84F6-908B7A697033}" type="slidenum">
               <a:rPr b="0" lang="en-US" sz="1200" spc="-1" strike="noStrike">
                 <a:solidFill>
                   <a:srgbClr val="000000"/>
@@ -590,7 +590,7 @@
               </a:lnSpc>
               <a:buNone/>
             </a:pPr>
-            <a:fld id="{3AC335B4-37CF-4B3A-BCC2-B4F31FAE067D}" type="slidenum">
+            <a:fld id="{E6DD50B6-AECF-491A-B28C-A2295E0F3C5E}" type="slidenum">
               <a:rPr b="0" lang="en-US" sz="1200" spc="-1" strike="noStrike">
                 <a:solidFill>
                   <a:srgbClr val="000000"/>
@@ -734,7 +734,7 @@
               </a:lnSpc>
               <a:buNone/>
             </a:pPr>
-            <a:fld id="{3D68313E-10FE-41F5-894E-31DDB525800D}" type="slidenum">
+            <a:fld id="{308FCB6F-CA49-492F-85FA-E31BC9B77BDF}" type="slidenum">
               <a:rPr b="0" lang="en-US" sz="1200" spc="-1" strike="noStrike">
                 <a:solidFill>
                   <a:srgbClr val="000000"/>
@@ -878,7 +878,7 @@
               </a:lnSpc>
               <a:buNone/>
             </a:pPr>
-            <a:fld id="{67712AAB-B444-4DCB-AFBB-026BEEB39001}" type="slidenum">
+            <a:fld id="{EDE5F2BC-8AAF-4B8D-B863-A8CCAE473374}" type="slidenum">
               <a:rPr b="0" lang="en-US" sz="1200" spc="-1" strike="noStrike">
                 <a:solidFill>
                   <a:srgbClr val="000000"/>
@@ -1022,7 +1022,7 @@
               </a:lnSpc>
               <a:buNone/>
             </a:pPr>
-            <a:fld id="{8323F370-AB30-414F-8E39-BEC89C399355}" type="slidenum">
+            <a:fld id="{C6144016-497B-4D65-900F-E7F4AA7EC11E}" type="slidenum">
               <a:rPr b="0" lang="en-US" sz="1200" spc="-1" strike="noStrike">
                 <a:solidFill>
                   <a:srgbClr val="000000"/>
@@ -1166,7 +1166,7 @@
               </a:lnSpc>
               <a:buNone/>
             </a:pPr>
-            <a:fld id="{E8895EF3-65B4-4537-8ECC-281B32146E01}" type="slidenum">
+            <a:fld id="{82621BC1-B0A8-4517-9695-8042CE92A006}" type="slidenum">
               <a:rPr b="0" lang="en-US" sz="1200" spc="-1" strike="noStrike">
                 <a:solidFill>
                   <a:srgbClr val="000000"/>
@@ -1310,7 +1310,7 @@
               </a:lnSpc>
               <a:buNone/>
             </a:pPr>
-            <a:fld id="{406709DF-E5E3-444A-8459-3A8D9E11F33C}" type="slidenum">
+            <a:fld id="{6771D186-90E4-4120-9838-35F16E9DA38A}" type="slidenum">
               <a:rPr b="0" lang="en-US" sz="1200" spc="-1" strike="noStrike">
                 <a:solidFill>
                   <a:srgbClr val="000000"/>
@@ -1454,7 +1454,7 @@
               </a:lnSpc>
               <a:buNone/>
             </a:pPr>
-            <a:fld id="{D397AC8C-64FA-4B30-B38F-4945BA40B59E}" type="slidenum">
+            <a:fld id="{10C634BD-AA12-4456-BB54-DB67325B9A1E}" type="slidenum">
               <a:rPr b="0" lang="en-US" sz="1200" spc="-1" strike="noStrike">
                 <a:solidFill>
                   <a:srgbClr val="000000"/>
@@ -1598,7 +1598,7 @@
               </a:lnSpc>
               <a:buNone/>
             </a:pPr>
-            <a:fld id="{6E0F001E-81C7-4F17-A8F3-8133FEC5328E}" type="slidenum">
+            <a:fld id="{C6EE6B51-9F42-4D3E-B885-18470CFFDD21}" type="slidenum">
               <a:rPr b="0" lang="en-US" sz="1200" spc="-1" strike="noStrike">
                 <a:solidFill>
                   <a:srgbClr val="000000"/>
@@ -1742,7 +1742,7 @@
               </a:lnSpc>
               <a:buNone/>
             </a:pPr>
-            <a:fld id="{3A9AEA95-0FC4-4C05-BF86-6FEA229E494C}" type="slidenum">
+            <a:fld id="{3CD0C70F-E947-49CF-83A3-0DEE585DC6F3}" type="slidenum">
               <a:rPr b="0" lang="en-US" sz="1200" spc="-1" strike="noStrike">
                 <a:solidFill>
                   <a:srgbClr val="000000"/>
@@ -1886,7 +1886,7 @@
               </a:lnSpc>
               <a:buNone/>
             </a:pPr>
-            <a:fld id="{4501DA41-BEEE-4BD2-8013-36A7845B31E4}" type="slidenum">
+            <a:fld id="{25D28DD8-0CE0-4011-A47A-A0B9CB774919}" type="slidenum">
               <a:rPr b="0" lang="en-US" sz="1200" spc="-1" strike="noStrike">
                 <a:solidFill>
                   <a:srgbClr val="000000"/>
@@ -3562,7 +3562,16 @@
                 </a:solidFill>
                 <a:latin typeface="Calibri"/>
               </a:rPr>
-              <a:t>Click to edit the title text format</a:t>
+              <a:t>Click to edit the title text </a:t>
+            </a:r>
+            <a:r>
+              <a:rPr b="0" lang="en-IN" sz="1800" spc="-1" strike="noStrike">
+                <a:solidFill>
+                  <a:srgbClr val="000000"/>
+                </a:solidFill>
+                <a:latin typeface="Calibri"/>
+              </a:rPr>
+              <a:t>format</a:t>
             </a:r>
             <a:endParaRPr b="0" lang="en-IN" sz="1800" spc="-1" strike="noStrike">
               <a:solidFill>
